--- a/Desenvolvimento de Software Corporativo/Boa Praticas/Aula04-BoasPraticas/Modelo de Apresentação.pptx
+++ b/Desenvolvimento de Software Corporativo/Boa Praticas/Aula04-BoasPraticas/Modelo de Apresentação.pptx
@@ -8,6 +8,9 @@
     <p:sldId id="256" r:id="rId2"/>
     <p:sldId id="261" r:id="rId3"/>
     <p:sldId id="262" r:id="rId4"/>
+    <p:sldId id="263" r:id="rId5"/>
+    <p:sldId id="264" r:id="rId6"/>
+    <p:sldId id="265" r:id="rId7"/>
   </p:sldIdLst>
   <p:sldSz cx="12192000" cy="6858000"/>
   <p:notesSz cx="6858000" cy="9144000"/>
@@ -4404,6 +4407,1697 @@
 </p:sld>
 </file>
 
+<file path=ppt/slides/slide4.xml><?xml version="1.0" encoding="utf-8"?>
+<p:sld xmlns:a="http://schemas.openxmlformats.org/drawingml/2006/main" xmlns:r="http://schemas.openxmlformats.org/officeDocument/2006/relationships" xmlns:p="http://schemas.openxmlformats.org/presentationml/2006/main">
+  <p:cSld>
+    <p:spTree>
+      <p:nvGrpSpPr>
+        <p:cNvPr id="1" name=""/>
+        <p:cNvGrpSpPr/>
+        <p:nvPr/>
+      </p:nvGrpSpPr>
+      <p:grpSpPr>
+        <a:xfrm>
+          <a:off x="0" y="0"/>
+          <a:ext cx="0" cy="0"/>
+          <a:chOff x="0" y="0"/>
+          <a:chExt cx="0" cy="0"/>
+        </a:xfrm>
+      </p:grpSpPr>
+      <p:sp>
+        <p:nvSpPr>
+          <p:cNvPr id="2" name="Título 1">
+            <a:extLst>
+              <a:ext uri="{FF2B5EF4-FFF2-40B4-BE49-F238E27FC236}">
+                <a16:creationId xmlns:a16="http://schemas.microsoft.com/office/drawing/2014/main" id="{F9B4CEBC-29AA-0B64-6D86-B49A19BD51FC}"/>
+              </a:ext>
+            </a:extLst>
+          </p:cNvPr>
+          <p:cNvSpPr>
+            <a:spLocks noGrp="1"/>
+          </p:cNvSpPr>
+          <p:nvPr>
+            <p:ph type="title"/>
+          </p:nvPr>
+        </p:nvSpPr>
+        <p:spPr>
+          <a:xfrm>
+            <a:off x="749185" y="854420"/>
+            <a:ext cx="9409981" cy="448573"/>
+          </a:xfrm>
+        </p:spPr>
+        <p:txBody>
+          <a:bodyPr>
+            <a:normAutofit/>
+          </a:bodyPr>
+          <a:lstStyle/>
+          <a:p>
+            <a:r>
+              <a:rPr lang="pt-BR" sz="2600" b="1" dirty="0"/>
+              <a:t>Os principais métodos HTTP</a:t>
+            </a:r>
+          </a:p>
+        </p:txBody>
+      </p:sp>
+      <p:graphicFrame>
+        <p:nvGraphicFramePr>
+          <p:cNvPr id="4" name="Tabela 3">
+            <a:extLst>
+              <a:ext uri="{FF2B5EF4-FFF2-40B4-BE49-F238E27FC236}">
+                <a16:creationId xmlns:a16="http://schemas.microsoft.com/office/drawing/2014/main" id="{D5FD78D7-7ED8-1593-FC54-8D4E2A2ECF2C}"/>
+              </a:ext>
+            </a:extLst>
+          </p:cNvPr>
+          <p:cNvGraphicFramePr>
+            <a:graphicFrameLocks noGrp="1"/>
+          </p:cNvGraphicFramePr>
+          <p:nvPr>
+            <p:extLst>
+              <p:ext uri="{D42A27DB-BD31-4B8C-83A1-F6EECF244321}">
+                <p14:modId xmlns:p14="http://schemas.microsoft.com/office/powerpoint/2010/main" val="2534613956"/>
+              </p:ext>
+            </p:extLst>
+          </p:nvPr>
+        </p:nvGraphicFramePr>
+        <p:xfrm>
+          <a:off x="1795568" y="2176304"/>
+          <a:ext cx="8600865" cy="3688080"/>
+        </p:xfrm>
+        <a:graphic>
+          <a:graphicData uri="http://schemas.openxmlformats.org/drawingml/2006/table">
+            <a:tbl>
+              <a:tblPr/>
+              <a:tblGrid>
+                <a:gridCol w="2230544">
+                  <a:extLst>
+                    <a:ext uri="{9D8B030D-6E8A-4147-A177-3AD203B41FA5}">
+                      <a16:colId xmlns:a16="http://schemas.microsoft.com/office/drawing/2014/main" val="4025802244"/>
+                    </a:ext>
+                  </a:extLst>
+                </a:gridCol>
+                <a:gridCol w="2370244">
+                  <a:extLst>
+                    <a:ext uri="{9D8B030D-6E8A-4147-A177-3AD203B41FA5}">
+                      <a16:colId xmlns:a16="http://schemas.microsoft.com/office/drawing/2014/main" val="263985013"/>
+                    </a:ext>
+                  </a:extLst>
+                </a:gridCol>
+                <a:gridCol w="4000077">
+                  <a:extLst>
+                    <a:ext uri="{9D8B030D-6E8A-4147-A177-3AD203B41FA5}">
+                      <a16:colId xmlns:a16="http://schemas.microsoft.com/office/drawing/2014/main" val="1048547562"/>
+                    </a:ext>
+                  </a:extLst>
+                </a:gridCol>
+              </a:tblGrid>
+              <a:tr h="737616">
+                <a:tc>
+                  <a:txBody>
+                    <a:bodyPr/>
+                    <a:lstStyle/>
+                    <a:p>
+                      <a:pPr algn="ctr">
+                        <a:buNone/>
+                      </a:pPr>
+                      <a:r>
+                        <a:rPr lang="pt-BR" sz="3300" b="1" dirty="0">
+                          <a:solidFill>
+                            <a:schemeClr val="bg1"/>
+                          </a:solidFill>
+                          <a:latin typeface="Times New Roman" panose="02020603050405020304" pitchFamily="18" charset="0"/>
+                          <a:cs typeface="Times New Roman" panose="02020603050405020304" pitchFamily="18" charset="0"/>
+                        </a:rPr>
+                        <a:t>Método</a:t>
+                      </a:r>
+                    </a:p>
+                  </a:txBody>
+                  <a:tcPr marL="167640" marR="167640" marT="83820" marB="83820" anchor="ctr">
+                    <a:lnL w="12700" cap="flat" cmpd="sng" algn="ctr">
+                      <a:solidFill>
+                        <a:schemeClr val="tx1"/>
+                      </a:solidFill>
+                      <a:prstDash val="solid"/>
+                      <a:round/>
+                      <a:headEnd type="none" w="med" len="med"/>
+                      <a:tailEnd type="none" w="med" len="med"/>
+                    </a:lnL>
+                    <a:lnR w="12700" cap="flat" cmpd="sng" algn="ctr">
+                      <a:solidFill>
+                        <a:schemeClr val="tx1"/>
+                      </a:solidFill>
+                      <a:prstDash val="solid"/>
+                      <a:round/>
+                      <a:headEnd type="none" w="med" len="med"/>
+                      <a:tailEnd type="none" w="med" len="med"/>
+                    </a:lnR>
+                    <a:lnT w="12700" cap="flat" cmpd="sng" algn="ctr">
+                      <a:solidFill>
+                        <a:schemeClr val="tx1"/>
+                      </a:solidFill>
+                      <a:prstDash val="solid"/>
+                      <a:round/>
+                      <a:headEnd type="none" w="med" len="med"/>
+                      <a:tailEnd type="none" w="med" len="med"/>
+                    </a:lnT>
+                    <a:lnB w="12700" cap="flat" cmpd="sng" algn="ctr">
+                      <a:solidFill>
+                        <a:schemeClr val="tx1"/>
+                      </a:solidFill>
+                      <a:prstDash val="solid"/>
+                      <a:round/>
+                      <a:headEnd type="none" w="med" len="med"/>
+                      <a:tailEnd type="none" w="med" len="med"/>
+                    </a:lnB>
+                    <a:solidFill>
+                      <a:srgbClr val="292A86"/>
+                    </a:solidFill>
+                  </a:tcPr>
+                </a:tc>
+                <a:tc>
+                  <a:txBody>
+                    <a:bodyPr/>
+                    <a:lstStyle/>
+                    <a:p>
+                      <a:pPr algn="ctr">
+                        <a:buNone/>
+                      </a:pPr>
+                      <a:r>
+                        <a:rPr lang="pt-BR" sz="3300" b="1" dirty="0">
+                          <a:solidFill>
+                            <a:schemeClr val="bg1"/>
+                          </a:solidFill>
+                          <a:latin typeface="Times New Roman" panose="02020603050405020304" pitchFamily="18" charset="0"/>
+                          <a:cs typeface="Times New Roman" panose="02020603050405020304" pitchFamily="18" charset="0"/>
+                        </a:rPr>
+                        <a:t>Objetivo</a:t>
+                      </a:r>
+                    </a:p>
+                  </a:txBody>
+                  <a:tcPr marL="167640" marR="167640" marT="83820" marB="83820" anchor="ctr">
+                    <a:lnL w="12700" cap="flat" cmpd="sng" algn="ctr">
+                      <a:solidFill>
+                        <a:schemeClr val="tx1"/>
+                      </a:solidFill>
+                      <a:prstDash val="solid"/>
+                      <a:round/>
+                      <a:headEnd type="none" w="med" len="med"/>
+                      <a:tailEnd type="none" w="med" len="med"/>
+                    </a:lnL>
+                    <a:lnR w="12700" cap="flat" cmpd="sng" algn="ctr">
+                      <a:solidFill>
+                        <a:schemeClr val="tx1"/>
+                      </a:solidFill>
+                      <a:prstDash val="solid"/>
+                      <a:round/>
+                      <a:headEnd type="none" w="med" len="med"/>
+                      <a:tailEnd type="none" w="med" len="med"/>
+                    </a:lnR>
+                    <a:lnT w="12700" cap="flat" cmpd="sng" algn="ctr">
+                      <a:solidFill>
+                        <a:schemeClr val="tx1"/>
+                      </a:solidFill>
+                      <a:prstDash val="solid"/>
+                      <a:round/>
+                      <a:headEnd type="none" w="med" len="med"/>
+                      <a:tailEnd type="none" w="med" len="med"/>
+                    </a:lnT>
+                    <a:lnB w="12700" cap="flat" cmpd="sng" algn="ctr">
+                      <a:solidFill>
+                        <a:schemeClr val="tx1"/>
+                      </a:solidFill>
+                      <a:prstDash val="solid"/>
+                      <a:round/>
+                      <a:headEnd type="none" w="med" len="med"/>
+                      <a:tailEnd type="none" w="med" len="med"/>
+                    </a:lnB>
+                    <a:solidFill>
+                      <a:srgbClr val="292A86"/>
+                    </a:solidFill>
+                  </a:tcPr>
+                </a:tc>
+                <a:tc>
+                  <a:txBody>
+                    <a:bodyPr/>
+                    <a:lstStyle/>
+                    <a:p>
+                      <a:pPr algn="ctr">
+                        <a:buNone/>
+                      </a:pPr>
+                      <a:r>
+                        <a:rPr lang="pt-BR" sz="3300" b="1" dirty="0">
+                          <a:solidFill>
+                            <a:schemeClr val="bg1"/>
+                          </a:solidFill>
+                          <a:latin typeface="Times New Roman" panose="02020603050405020304" pitchFamily="18" charset="0"/>
+                          <a:cs typeface="Times New Roman" panose="02020603050405020304" pitchFamily="18" charset="0"/>
+                        </a:rPr>
+                        <a:t>Exemplo</a:t>
+                      </a:r>
+                    </a:p>
+                  </a:txBody>
+                  <a:tcPr marL="167640" marR="167640" marT="83820" marB="83820" anchor="ctr">
+                    <a:lnL w="12700" cap="flat" cmpd="sng" algn="ctr">
+                      <a:solidFill>
+                        <a:schemeClr val="tx1"/>
+                      </a:solidFill>
+                      <a:prstDash val="solid"/>
+                      <a:round/>
+                      <a:headEnd type="none" w="med" len="med"/>
+                      <a:tailEnd type="none" w="med" len="med"/>
+                    </a:lnL>
+                    <a:lnR w="12700" cap="flat" cmpd="sng" algn="ctr">
+                      <a:solidFill>
+                        <a:schemeClr val="tx1"/>
+                      </a:solidFill>
+                      <a:prstDash val="solid"/>
+                      <a:round/>
+                      <a:headEnd type="none" w="med" len="med"/>
+                      <a:tailEnd type="none" w="med" len="med"/>
+                    </a:lnR>
+                    <a:lnT w="12700" cap="flat" cmpd="sng" algn="ctr">
+                      <a:solidFill>
+                        <a:schemeClr val="tx1"/>
+                      </a:solidFill>
+                      <a:prstDash val="solid"/>
+                      <a:round/>
+                      <a:headEnd type="none" w="med" len="med"/>
+                      <a:tailEnd type="none" w="med" len="med"/>
+                    </a:lnT>
+                    <a:lnB w="12700" cap="flat" cmpd="sng" algn="ctr">
+                      <a:solidFill>
+                        <a:schemeClr val="tx1"/>
+                      </a:solidFill>
+                      <a:prstDash val="solid"/>
+                      <a:round/>
+                      <a:headEnd type="none" w="med" len="med"/>
+                      <a:tailEnd type="none" w="med" len="med"/>
+                    </a:lnB>
+                    <a:solidFill>
+                      <a:srgbClr val="292A86"/>
+                    </a:solidFill>
+                  </a:tcPr>
+                </a:tc>
+                <a:extLst>
+                  <a:ext uri="{0D108BD9-81ED-4DB2-BD59-A6C34878D82A}">
+                    <a16:rowId xmlns:a16="http://schemas.microsoft.com/office/drawing/2014/main" val="1323813336"/>
+                  </a:ext>
+                </a:extLst>
+              </a:tr>
+              <a:tr h="737616">
+                <a:tc>
+                  <a:txBody>
+                    <a:bodyPr/>
+                    <a:lstStyle/>
+                    <a:p>
+                      <a:pPr algn="ctr">
+                        <a:buNone/>
+                      </a:pPr>
+                      <a:r>
+                        <a:rPr lang="pt-BR" sz="2800" b="0" dirty="0">
+                          <a:latin typeface="Times New Roman" panose="02020603050405020304" pitchFamily="18" charset="0"/>
+                          <a:cs typeface="Times New Roman" panose="02020603050405020304" pitchFamily="18" charset="0"/>
+                        </a:rPr>
+                        <a:t>GET</a:t>
+                      </a:r>
+                    </a:p>
+                  </a:txBody>
+                  <a:tcPr marL="167640" marR="167640" marT="83820" marB="83820" anchor="ctr">
+                    <a:lnL w="12700" cap="flat" cmpd="sng" algn="ctr">
+                      <a:solidFill>
+                        <a:schemeClr val="tx1"/>
+                      </a:solidFill>
+                      <a:prstDash val="solid"/>
+                      <a:round/>
+                      <a:headEnd type="none" w="med" len="med"/>
+                      <a:tailEnd type="none" w="med" len="med"/>
+                    </a:lnL>
+                    <a:lnR w="12700" cap="flat" cmpd="sng" algn="ctr">
+                      <a:solidFill>
+                        <a:schemeClr val="tx1"/>
+                      </a:solidFill>
+                      <a:prstDash val="solid"/>
+                      <a:round/>
+                      <a:headEnd type="none" w="med" len="med"/>
+                      <a:tailEnd type="none" w="med" len="med"/>
+                    </a:lnR>
+                    <a:lnT w="12700" cap="flat" cmpd="sng" algn="ctr">
+                      <a:solidFill>
+                        <a:schemeClr val="tx1"/>
+                      </a:solidFill>
+                      <a:prstDash val="solid"/>
+                      <a:round/>
+                      <a:headEnd type="none" w="med" len="med"/>
+                      <a:tailEnd type="none" w="med" len="med"/>
+                    </a:lnT>
+                    <a:lnB w="12700" cap="flat" cmpd="sng" algn="ctr">
+                      <a:solidFill>
+                        <a:schemeClr val="tx1"/>
+                      </a:solidFill>
+                      <a:prstDash val="solid"/>
+                      <a:round/>
+                      <a:headEnd type="none" w="med" len="med"/>
+                      <a:tailEnd type="none" w="med" len="med"/>
+                    </a:lnB>
+                    <a:noFill/>
+                  </a:tcPr>
+                </a:tc>
+                <a:tc>
+                  <a:txBody>
+                    <a:bodyPr/>
+                    <a:lstStyle/>
+                    <a:p>
+                      <a:pPr algn="ctr">
+                        <a:buNone/>
+                      </a:pPr>
+                      <a:r>
+                        <a:rPr lang="pt-BR" sz="2800" dirty="0">
+                          <a:latin typeface="Times New Roman" panose="02020603050405020304" pitchFamily="18" charset="0"/>
+                          <a:cs typeface="Times New Roman" panose="02020603050405020304" pitchFamily="18" charset="0"/>
+                        </a:rPr>
+                        <a:t>Consultar</a:t>
+                      </a:r>
+                    </a:p>
+                  </a:txBody>
+                  <a:tcPr marL="167640" marR="167640" marT="83820" marB="83820" anchor="ctr">
+                    <a:lnL w="12700" cap="flat" cmpd="sng" algn="ctr">
+                      <a:solidFill>
+                        <a:schemeClr val="tx1"/>
+                      </a:solidFill>
+                      <a:prstDash val="solid"/>
+                      <a:round/>
+                      <a:headEnd type="none" w="med" len="med"/>
+                      <a:tailEnd type="none" w="med" len="med"/>
+                    </a:lnL>
+                    <a:lnR w="12700" cap="flat" cmpd="sng" algn="ctr">
+                      <a:solidFill>
+                        <a:schemeClr val="tx1"/>
+                      </a:solidFill>
+                      <a:prstDash val="solid"/>
+                      <a:round/>
+                      <a:headEnd type="none" w="med" len="med"/>
+                      <a:tailEnd type="none" w="med" len="med"/>
+                    </a:lnR>
+                    <a:lnT w="12700" cap="flat" cmpd="sng" algn="ctr">
+                      <a:solidFill>
+                        <a:schemeClr val="tx1"/>
+                      </a:solidFill>
+                      <a:prstDash val="solid"/>
+                      <a:round/>
+                      <a:headEnd type="none" w="med" len="med"/>
+                      <a:tailEnd type="none" w="med" len="med"/>
+                    </a:lnT>
+                    <a:lnB w="12700" cap="flat" cmpd="sng" algn="ctr">
+                      <a:solidFill>
+                        <a:schemeClr val="tx1"/>
+                      </a:solidFill>
+                      <a:prstDash val="solid"/>
+                      <a:round/>
+                      <a:headEnd type="none" w="med" len="med"/>
+                      <a:tailEnd type="none" w="med" len="med"/>
+                    </a:lnB>
+                    <a:noFill/>
+                  </a:tcPr>
+                </a:tc>
+                <a:tc>
+                  <a:txBody>
+                    <a:bodyPr/>
+                    <a:lstStyle/>
+                    <a:p>
+                      <a:pPr algn="ctr">
+                        <a:buNone/>
+                      </a:pPr>
+                      <a:r>
+                        <a:rPr lang="pt-BR" sz="2800" dirty="0">
+                          <a:latin typeface="Times New Roman" panose="02020603050405020304" pitchFamily="18" charset="0"/>
+                          <a:cs typeface="Times New Roman" panose="02020603050405020304" pitchFamily="18" charset="0"/>
+                        </a:rPr>
+                        <a:t>Buscar dentistas</a:t>
+                      </a:r>
+                    </a:p>
+                  </a:txBody>
+                  <a:tcPr marL="167640" marR="167640" marT="83820" marB="83820" anchor="ctr">
+                    <a:lnL w="12700" cap="flat" cmpd="sng" algn="ctr">
+                      <a:solidFill>
+                        <a:schemeClr val="tx1"/>
+                      </a:solidFill>
+                      <a:prstDash val="solid"/>
+                      <a:round/>
+                      <a:headEnd type="none" w="med" len="med"/>
+                      <a:tailEnd type="none" w="med" len="med"/>
+                    </a:lnL>
+                    <a:lnR w="12700" cap="flat" cmpd="sng" algn="ctr">
+                      <a:solidFill>
+                        <a:schemeClr val="tx1"/>
+                      </a:solidFill>
+                      <a:prstDash val="solid"/>
+                      <a:round/>
+                      <a:headEnd type="none" w="med" len="med"/>
+                      <a:tailEnd type="none" w="med" len="med"/>
+                    </a:lnR>
+                    <a:lnT w="12700" cap="flat" cmpd="sng" algn="ctr">
+                      <a:solidFill>
+                        <a:schemeClr val="tx1"/>
+                      </a:solidFill>
+                      <a:prstDash val="solid"/>
+                      <a:round/>
+                      <a:headEnd type="none" w="med" len="med"/>
+                      <a:tailEnd type="none" w="med" len="med"/>
+                    </a:lnT>
+                    <a:lnB w="12700" cap="flat" cmpd="sng" algn="ctr">
+                      <a:solidFill>
+                        <a:schemeClr val="tx1"/>
+                      </a:solidFill>
+                      <a:prstDash val="solid"/>
+                      <a:round/>
+                      <a:headEnd type="none" w="med" len="med"/>
+                      <a:tailEnd type="none" w="med" len="med"/>
+                    </a:lnB>
+                    <a:noFill/>
+                  </a:tcPr>
+                </a:tc>
+                <a:extLst>
+                  <a:ext uri="{0D108BD9-81ED-4DB2-BD59-A6C34878D82A}">
+                    <a16:rowId xmlns:a16="http://schemas.microsoft.com/office/drawing/2014/main" val="2322003081"/>
+                  </a:ext>
+                </a:extLst>
+              </a:tr>
+              <a:tr h="737616">
+                <a:tc>
+                  <a:txBody>
+                    <a:bodyPr/>
+                    <a:lstStyle/>
+                    <a:p>
+                      <a:pPr algn="ctr">
+                        <a:buNone/>
+                      </a:pPr>
+                      <a:r>
+                        <a:rPr lang="pt-BR" sz="2800" b="0" dirty="0">
+                          <a:latin typeface="Times New Roman" panose="02020603050405020304" pitchFamily="18" charset="0"/>
+                          <a:cs typeface="Times New Roman" panose="02020603050405020304" pitchFamily="18" charset="0"/>
+                        </a:rPr>
+                        <a:t>POST</a:t>
+                      </a:r>
+                    </a:p>
+                  </a:txBody>
+                  <a:tcPr marL="167640" marR="167640" marT="83820" marB="83820" anchor="ctr">
+                    <a:lnL w="12700" cap="flat" cmpd="sng" algn="ctr">
+                      <a:solidFill>
+                        <a:schemeClr val="tx1"/>
+                      </a:solidFill>
+                      <a:prstDash val="solid"/>
+                      <a:round/>
+                      <a:headEnd type="none" w="med" len="med"/>
+                      <a:tailEnd type="none" w="med" len="med"/>
+                    </a:lnL>
+                    <a:lnR w="12700" cap="flat" cmpd="sng" algn="ctr">
+                      <a:solidFill>
+                        <a:schemeClr val="tx1"/>
+                      </a:solidFill>
+                      <a:prstDash val="solid"/>
+                      <a:round/>
+                      <a:headEnd type="none" w="med" len="med"/>
+                      <a:tailEnd type="none" w="med" len="med"/>
+                    </a:lnR>
+                    <a:lnT w="12700" cap="flat" cmpd="sng" algn="ctr">
+                      <a:solidFill>
+                        <a:schemeClr val="tx1"/>
+                      </a:solidFill>
+                      <a:prstDash val="solid"/>
+                      <a:round/>
+                      <a:headEnd type="none" w="med" len="med"/>
+                      <a:tailEnd type="none" w="med" len="med"/>
+                    </a:lnT>
+                    <a:lnB w="12700" cap="flat" cmpd="sng" algn="ctr">
+                      <a:solidFill>
+                        <a:schemeClr val="tx1"/>
+                      </a:solidFill>
+                      <a:prstDash val="solid"/>
+                      <a:round/>
+                      <a:headEnd type="none" w="med" len="med"/>
+                      <a:tailEnd type="none" w="med" len="med"/>
+                    </a:lnB>
+                    <a:noFill/>
+                  </a:tcPr>
+                </a:tc>
+                <a:tc>
+                  <a:txBody>
+                    <a:bodyPr/>
+                    <a:lstStyle/>
+                    <a:p>
+                      <a:pPr algn="ctr">
+                        <a:buNone/>
+                      </a:pPr>
+                      <a:r>
+                        <a:rPr lang="pt-BR" sz="2800" dirty="0">
+                          <a:latin typeface="Times New Roman" panose="02020603050405020304" pitchFamily="18" charset="0"/>
+                          <a:cs typeface="Times New Roman" panose="02020603050405020304" pitchFamily="18" charset="0"/>
+                        </a:rPr>
+                        <a:t>Criar</a:t>
+                      </a:r>
+                    </a:p>
+                  </a:txBody>
+                  <a:tcPr marL="167640" marR="167640" marT="83820" marB="83820" anchor="ctr">
+                    <a:lnL w="12700" cap="flat" cmpd="sng" algn="ctr">
+                      <a:solidFill>
+                        <a:schemeClr val="tx1"/>
+                      </a:solidFill>
+                      <a:prstDash val="solid"/>
+                      <a:round/>
+                      <a:headEnd type="none" w="med" len="med"/>
+                      <a:tailEnd type="none" w="med" len="med"/>
+                    </a:lnL>
+                    <a:lnR w="12700" cap="flat" cmpd="sng" algn="ctr">
+                      <a:solidFill>
+                        <a:schemeClr val="tx1"/>
+                      </a:solidFill>
+                      <a:prstDash val="solid"/>
+                      <a:round/>
+                      <a:headEnd type="none" w="med" len="med"/>
+                      <a:tailEnd type="none" w="med" len="med"/>
+                    </a:lnR>
+                    <a:lnT w="12700" cap="flat" cmpd="sng" algn="ctr">
+                      <a:solidFill>
+                        <a:schemeClr val="tx1"/>
+                      </a:solidFill>
+                      <a:prstDash val="solid"/>
+                      <a:round/>
+                      <a:headEnd type="none" w="med" len="med"/>
+                      <a:tailEnd type="none" w="med" len="med"/>
+                    </a:lnT>
+                    <a:lnB w="12700" cap="flat" cmpd="sng" algn="ctr">
+                      <a:solidFill>
+                        <a:schemeClr val="tx1"/>
+                      </a:solidFill>
+                      <a:prstDash val="solid"/>
+                      <a:round/>
+                      <a:headEnd type="none" w="med" len="med"/>
+                      <a:tailEnd type="none" w="med" len="med"/>
+                    </a:lnB>
+                    <a:noFill/>
+                  </a:tcPr>
+                </a:tc>
+                <a:tc>
+                  <a:txBody>
+                    <a:bodyPr/>
+                    <a:lstStyle/>
+                    <a:p>
+                      <a:pPr algn="ctr">
+                        <a:buNone/>
+                      </a:pPr>
+                      <a:r>
+                        <a:rPr lang="pt-BR" sz="2800" dirty="0">
+                          <a:latin typeface="Times New Roman" panose="02020603050405020304" pitchFamily="18" charset="0"/>
+                          <a:cs typeface="Times New Roman" panose="02020603050405020304" pitchFamily="18" charset="0"/>
+                        </a:rPr>
+                        <a:t>Cadastrar dentista</a:t>
+                      </a:r>
+                    </a:p>
+                  </a:txBody>
+                  <a:tcPr marL="167640" marR="167640" marT="83820" marB="83820" anchor="ctr">
+                    <a:lnL w="12700" cap="flat" cmpd="sng" algn="ctr">
+                      <a:solidFill>
+                        <a:schemeClr val="tx1"/>
+                      </a:solidFill>
+                      <a:prstDash val="solid"/>
+                      <a:round/>
+                      <a:headEnd type="none" w="med" len="med"/>
+                      <a:tailEnd type="none" w="med" len="med"/>
+                    </a:lnL>
+                    <a:lnR w="12700" cap="flat" cmpd="sng" algn="ctr">
+                      <a:solidFill>
+                        <a:schemeClr val="tx1"/>
+                      </a:solidFill>
+                      <a:prstDash val="solid"/>
+                      <a:round/>
+                      <a:headEnd type="none" w="med" len="med"/>
+                      <a:tailEnd type="none" w="med" len="med"/>
+                    </a:lnR>
+                    <a:lnT w="12700" cap="flat" cmpd="sng" algn="ctr">
+                      <a:solidFill>
+                        <a:schemeClr val="tx1"/>
+                      </a:solidFill>
+                      <a:prstDash val="solid"/>
+                      <a:round/>
+                      <a:headEnd type="none" w="med" len="med"/>
+                      <a:tailEnd type="none" w="med" len="med"/>
+                    </a:lnT>
+                    <a:lnB w="12700" cap="flat" cmpd="sng" algn="ctr">
+                      <a:solidFill>
+                        <a:schemeClr val="tx1"/>
+                      </a:solidFill>
+                      <a:prstDash val="solid"/>
+                      <a:round/>
+                      <a:headEnd type="none" w="med" len="med"/>
+                      <a:tailEnd type="none" w="med" len="med"/>
+                    </a:lnB>
+                    <a:noFill/>
+                  </a:tcPr>
+                </a:tc>
+                <a:extLst>
+                  <a:ext uri="{0D108BD9-81ED-4DB2-BD59-A6C34878D82A}">
+                    <a16:rowId xmlns:a16="http://schemas.microsoft.com/office/drawing/2014/main" val="347996890"/>
+                  </a:ext>
+                </a:extLst>
+              </a:tr>
+              <a:tr h="737616">
+                <a:tc>
+                  <a:txBody>
+                    <a:bodyPr/>
+                    <a:lstStyle/>
+                    <a:p>
+                      <a:pPr algn="ctr">
+                        <a:buNone/>
+                      </a:pPr>
+                      <a:r>
+                        <a:rPr lang="pt-BR" sz="2800" b="0" dirty="0">
+                          <a:latin typeface="Times New Roman" panose="02020603050405020304" pitchFamily="18" charset="0"/>
+                          <a:cs typeface="Times New Roman" panose="02020603050405020304" pitchFamily="18" charset="0"/>
+                        </a:rPr>
+                        <a:t>PUT</a:t>
+                      </a:r>
+                    </a:p>
+                  </a:txBody>
+                  <a:tcPr marL="167640" marR="167640" marT="83820" marB="83820" anchor="ctr">
+                    <a:lnL w="12700" cap="flat" cmpd="sng" algn="ctr">
+                      <a:solidFill>
+                        <a:schemeClr val="tx1"/>
+                      </a:solidFill>
+                      <a:prstDash val="solid"/>
+                      <a:round/>
+                      <a:headEnd type="none" w="med" len="med"/>
+                      <a:tailEnd type="none" w="med" len="med"/>
+                    </a:lnL>
+                    <a:lnR w="12700" cap="flat" cmpd="sng" algn="ctr">
+                      <a:solidFill>
+                        <a:schemeClr val="tx1"/>
+                      </a:solidFill>
+                      <a:prstDash val="solid"/>
+                      <a:round/>
+                      <a:headEnd type="none" w="med" len="med"/>
+                      <a:tailEnd type="none" w="med" len="med"/>
+                    </a:lnR>
+                    <a:lnT w="12700" cap="flat" cmpd="sng" algn="ctr">
+                      <a:solidFill>
+                        <a:schemeClr val="tx1"/>
+                      </a:solidFill>
+                      <a:prstDash val="solid"/>
+                      <a:round/>
+                      <a:headEnd type="none" w="med" len="med"/>
+                      <a:tailEnd type="none" w="med" len="med"/>
+                    </a:lnT>
+                    <a:lnB w="12700" cap="flat" cmpd="sng" algn="ctr">
+                      <a:solidFill>
+                        <a:schemeClr val="tx1"/>
+                      </a:solidFill>
+                      <a:prstDash val="solid"/>
+                      <a:round/>
+                      <a:headEnd type="none" w="med" len="med"/>
+                      <a:tailEnd type="none" w="med" len="med"/>
+                    </a:lnB>
+                    <a:noFill/>
+                  </a:tcPr>
+                </a:tc>
+                <a:tc>
+                  <a:txBody>
+                    <a:bodyPr/>
+                    <a:lstStyle/>
+                    <a:p>
+                      <a:pPr algn="ctr">
+                        <a:buNone/>
+                      </a:pPr>
+                      <a:r>
+                        <a:rPr lang="pt-BR" sz="2800">
+                          <a:latin typeface="Times New Roman" panose="02020603050405020304" pitchFamily="18" charset="0"/>
+                          <a:cs typeface="Times New Roman" panose="02020603050405020304" pitchFamily="18" charset="0"/>
+                        </a:rPr>
+                        <a:t>Atualizar</a:t>
+                      </a:r>
+                    </a:p>
+                  </a:txBody>
+                  <a:tcPr marL="167640" marR="167640" marT="83820" marB="83820" anchor="ctr">
+                    <a:lnL w="12700" cap="flat" cmpd="sng" algn="ctr">
+                      <a:solidFill>
+                        <a:schemeClr val="tx1"/>
+                      </a:solidFill>
+                      <a:prstDash val="solid"/>
+                      <a:round/>
+                      <a:headEnd type="none" w="med" len="med"/>
+                      <a:tailEnd type="none" w="med" len="med"/>
+                    </a:lnL>
+                    <a:lnR w="12700" cap="flat" cmpd="sng" algn="ctr">
+                      <a:solidFill>
+                        <a:schemeClr val="tx1"/>
+                      </a:solidFill>
+                      <a:prstDash val="solid"/>
+                      <a:round/>
+                      <a:headEnd type="none" w="med" len="med"/>
+                      <a:tailEnd type="none" w="med" len="med"/>
+                    </a:lnR>
+                    <a:lnT w="12700" cap="flat" cmpd="sng" algn="ctr">
+                      <a:solidFill>
+                        <a:schemeClr val="tx1"/>
+                      </a:solidFill>
+                      <a:prstDash val="solid"/>
+                      <a:round/>
+                      <a:headEnd type="none" w="med" len="med"/>
+                      <a:tailEnd type="none" w="med" len="med"/>
+                    </a:lnT>
+                    <a:lnB w="12700" cap="flat" cmpd="sng" algn="ctr">
+                      <a:solidFill>
+                        <a:schemeClr val="tx1"/>
+                      </a:solidFill>
+                      <a:prstDash val="solid"/>
+                      <a:round/>
+                      <a:headEnd type="none" w="med" len="med"/>
+                      <a:tailEnd type="none" w="med" len="med"/>
+                    </a:lnB>
+                    <a:noFill/>
+                  </a:tcPr>
+                </a:tc>
+                <a:tc>
+                  <a:txBody>
+                    <a:bodyPr/>
+                    <a:lstStyle/>
+                    <a:p>
+                      <a:pPr algn="ctr">
+                        <a:buNone/>
+                      </a:pPr>
+                      <a:r>
+                        <a:rPr lang="pt-BR" sz="2800" dirty="0">
+                          <a:latin typeface="Times New Roman" panose="02020603050405020304" pitchFamily="18" charset="0"/>
+                          <a:cs typeface="Times New Roman" panose="02020603050405020304" pitchFamily="18" charset="0"/>
+                        </a:rPr>
+                        <a:t>Alterar dentista</a:t>
+                      </a:r>
+                    </a:p>
+                  </a:txBody>
+                  <a:tcPr marL="167640" marR="167640" marT="83820" marB="83820" anchor="ctr">
+                    <a:lnL w="12700" cap="flat" cmpd="sng" algn="ctr">
+                      <a:solidFill>
+                        <a:schemeClr val="tx1"/>
+                      </a:solidFill>
+                      <a:prstDash val="solid"/>
+                      <a:round/>
+                      <a:headEnd type="none" w="med" len="med"/>
+                      <a:tailEnd type="none" w="med" len="med"/>
+                    </a:lnL>
+                    <a:lnR w="12700" cap="flat" cmpd="sng" algn="ctr">
+                      <a:solidFill>
+                        <a:schemeClr val="tx1"/>
+                      </a:solidFill>
+                      <a:prstDash val="solid"/>
+                      <a:round/>
+                      <a:headEnd type="none" w="med" len="med"/>
+                      <a:tailEnd type="none" w="med" len="med"/>
+                    </a:lnR>
+                    <a:lnT w="12700" cap="flat" cmpd="sng" algn="ctr">
+                      <a:solidFill>
+                        <a:schemeClr val="tx1"/>
+                      </a:solidFill>
+                      <a:prstDash val="solid"/>
+                      <a:round/>
+                      <a:headEnd type="none" w="med" len="med"/>
+                      <a:tailEnd type="none" w="med" len="med"/>
+                    </a:lnT>
+                    <a:lnB w="12700" cap="flat" cmpd="sng" algn="ctr">
+                      <a:solidFill>
+                        <a:schemeClr val="tx1"/>
+                      </a:solidFill>
+                      <a:prstDash val="solid"/>
+                      <a:round/>
+                      <a:headEnd type="none" w="med" len="med"/>
+                      <a:tailEnd type="none" w="med" len="med"/>
+                    </a:lnB>
+                    <a:noFill/>
+                  </a:tcPr>
+                </a:tc>
+                <a:extLst>
+                  <a:ext uri="{0D108BD9-81ED-4DB2-BD59-A6C34878D82A}">
+                    <a16:rowId xmlns:a16="http://schemas.microsoft.com/office/drawing/2014/main" val="224629347"/>
+                  </a:ext>
+                </a:extLst>
+              </a:tr>
+              <a:tr h="737616">
+                <a:tc>
+                  <a:txBody>
+                    <a:bodyPr/>
+                    <a:lstStyle/>
+                    <a:p>
+                      <a:pPr algn="ctr">
+                        <a:buNone/>
+                      </a:pPr>
+                      <a:r>
+                        <a:rPr lang="pt-BR" sz="2800" b="0" dirty="0">
+                          <a:latin typeface="Times New Roman" panose="02020603050405020304" pitchFamily="18" charset="0"/>
+                          <a:cs typeface="Times New Roman" panose="02020603050405020304" pitchFamily="18" charset="0"/>
+                        </a:rPr>
+                        <a:t>DELETE</a:t>
+                      </a:r>
+                    </a:p>
+                  </a:txBody>
+                  <a:tcPr marL="167640" marR="167640" marT="83820" marB="83820" anchor="ctr">
+                    <a:lnL w="12700" cap="flat" cmpd="sng" algn="ctr">
+                      <a:solidFill>
+                        <a:schemeClr val="tx1"/>
+                      </a:solidFill>
+                      <a:prstDash val="solid"/>
+                      <a:round/>
+                      <a:headEnd type="none" w="med" len="med"/>
+                      <a:tailEnd type="none" w="med" len="med"/>
+                    </a:lnL>
+                    <a:lnR w="12700" cap="flat" cmpd="sng" algn="ctr">
+                      <a:solidFill>
+                        <a:schemeClr val="tx1"/>
+                      </a:solidFill>
+                      <a:prstDash val="solid"/>
+                      <a:round/>
+                      <a:headEnd type="none" w="med" len="med"/>
+                      <a:tailEnd type="none" w="med" len="med"/>
+                    </a:lnR>
+                    <a:lnT w="12700" cap="flat" cmpd="sng" algn="ctr">
+                      <a:solidFill>
+                        <a:schemeClr val="tx1"/>
+                      </a:solidFill>
+                      <a:prstDash val="solid"/>
+                      <a:round/>
+                      <a:headEnd type="none" w="med" len="med"/>
+                      <a:tailEnd type="none" w="med" len="med"/>
+                    </a:lnT>
+                    <a:lnB w="12700" cap="flat" cmpd="sng" algn="ctr">
+                      <a:solidFill>
+                        <a:schemeClr val="tx1"/>
+                      </a:solidFill>
+                      <a:prstDash val="solid"/>
+                      <a:round/>
+                      <a:headEnd type="none" w="med" len="med"/>
+                      <a:tailEnd type="none" w="med" len="med"/>
+                    </a:lnB>
+                    <a:noFill/>
+                  </a:tcPr>
+                </a:tc>
+                <a:tc>
+                  <a:txBody>
+                    <a:bodyPr/>
+                    <a:lstStyle/>
+                    <a:p>
+                      <a:pPr algn="ctr">
+                        <a:buNone/>
+                      </a:pPr>
+                      <a:r>
+                        <a:rPr lang="pt-BR" sz="2800">
+                          <a:latin typeface="Times New Roman" panose="02020603050405020304" pitchFamily="18" charset="0"/>
+                          <a:cs typeface="Times New Roman" panose="02020603050405020304" pitchFamily="18" charset="0"/>
+                        </a:rPr>
+                        <a:t>Excluir</a:t>
+                      </a:r>
+                    </a:p>
+                  </a:txBody>
+                  <a:tcPr marL="167640" marR="167640" marT="83820" marB="83820" anchor="ctr">
+                    <a:lnL w="12700" cap="flat" cmpd="sng" algn="ctr">
+                      <a:solidFill>
+                        <a:schemeClr val="tx1"/>
+                      </a:solidFill>
+                      <a:prstDash val="solid"/>
+                      <a:round/>
+                      <a:headEnd type="none" w="med" len="med"/>
+                      <a:tailEnd type="none" w="med" len="med"/>
+                    </a:lnL>
+                    <a:lnR w="12700" cap="flat" cmpd="sng" algn="ctr">
+                      <a:solidFill>
+                        <a:schemeClr val="tx1"/>
+                      </a:solidFill>
+                      <a:prstDash val="solid"/>
+                      <a:round/>
+                      <a:headEnd type="none" w="med" len="med"/>
+                      <a:tailEnd type="none" w="med" len="med"/>
+                    </a:lnR>
+                    <a:lnT w="12700" cap="flat" cmpd="sng" algn="ctr">
+                      <a:solidFill>
+                        <a:schemeClr val="tx1"/>
+                      </a:solidFill>
+                      <a:prstDash val="solid"/>
+                      <a:round/>
+                      <a:headEnd type="none" w="med" len="med"/>
+                      <a:tailEnd type="none" w="med" len="med"/>
+                    </a:lnT>
+                    <a:lnB w="12700" cap="flat" cmpd="sng" algn="ctr">
+                      <a:solidFill>
+                        <a:schemeClr val="tx1"/>
+                      </a:solidFill>
+                      <a:prstDash val="solid"/>
+                      <a:round/>
+                      <a:headEnd type="none" w="med" len="med"/>
+                      <a:tailEnd type="none" w="med" len="med"/>
+                    </a:lnB>
+                    <a:noFill/>
+                  </a:tcPr>
+                </a:tc>
+                <a:tc>
+                  <a:txBody>
+                    <a:bodyPr/>
+                    <a:lstStyle/>
+                    <a:p>
+                      <a:pPr algn="ctr">
+                        <a:buNone/>
+                      </a:pPr>
+                      <a:r>
+                        <a:rPr lang="pt-BR" sz="2800" dirty="0">
+                          <a:latin typeface="Times New Roman" panose="02020603050405020304" pitchFamily="18" charset="0"/>
+                          <a:cs typeface="Times New Roman" panose="02020603050405020304" pitchFamily="18" charset="0"/>
+                        </a:rPr>
+                        <a:t>Remover dentista</a:t>
+                      </a:r>
+                    </a:p>
+                  </a:txBody>
+                  <a:tcPr marL="167640" marR="167640" marT="83820" marB="83820" anchor="ctr">
+                    <a:lnL w="12700" cap="flat" cmpd="sng" algn="ctr">
+                      <a:solidFill>
+                        <a:schemeClr val="tx1"/>
+                      </a:solidFill>
+                      <a:prstDash val="solid"/>
+                      <a:round/>
+                      <a:headEnd type="none" w="med" len="med"/>
+                      <a:tailEnd type="none" w="med" len="med"/>
+                    </a:lnL>
+                    <a:lnR w="12700" cap="flat" cmpd="sng" algn="ctr">
+                      <a:solidFill>
+                        <a:schemeClr val="tx1"/>
+                      </a:solidFill>
+                      <a:prstDash val="solid"/>
+                      <a:round/>
+                      <a:headEnd type="none" w="med" len="med"/>
+                      <a:tailEnd type="none" w="med" len="med"/>
+                    </a:lnR>
+                    <a:lnT w="12700" cap="flat" cmpd="sng" algn="ctr">
+                      <a:solidFill>
+                        <a:schemeClr val="tx1"/>
+                      </a:solidFill>
+                      <a:prstDash val="solid"/>
+                      <a:round/>
+                      <a:headEnd type="none" w="med" len="med"/>
+                      <a:tailEnd type="none" w="med" len="med"/>
+                    </a:lnT>
+                    <a:lnB w="12700" cap="flat" cmpd="sng" algn="ctr">
+                      <a:solidFill>
+                        <a:schemeClr val="tx1"/>
+                      </a:solidFill>
+                      <a:prstDash val="solid"/>
+                      <a:round/>
+                      <a:headEnd type="none" w="med" len="med"/>
+                      <a:tailEnd type="none" w="med" len="med"/>
+                    </a:lnB>
+                    <a:noFill/>
+                  </a:tcPr>
+                </a:tc>
+                <a:extLst>
+                  <a:ext uri="{0D108BD9-81ED-4DB2-BD59-A6C34878D82A}">
+                    <a16:rowId xmlns:a16="http://schemas.microsoft.com/office/drawing/2014/main" val="1246206181"/>
+                  </a:ext>
+                </a:extLst>
+              </a:tr>
+            </a:tbl>
+          </a:graphicData>
+        </a:graphic>
+      </p:graphicFrame>
+    </p:spTree>
+    <p:extLst>
+      <p:ext uri="{BB962C8B-B14F-4D97-AF65-F5344CB8AC3E}">
+        <p14:creationId xmlns:p14="http://schemas.microsoft.com/office/powerpoint/2010/main" val="3091400304"/>
+      </p:ext>
+    </p:extLst>
+  </p:cSld>
+  <p:clrMapOvr>
+    <a:masterClrMapping/>
+  </p:clrMapOvr>
+</p:sld>
+</file>
+
+<file path=ppt/slides/slide5.xml><?xml version="1.0" encoding="utf-8"?>
+<p:sld xmlns:a="http://schemas.openxmlformats.org/drawingml/2006/main" xmlns:r="http://schemas.openxmlformats.org/officeDocument/2006/relationships" xmlns:p="http://schemas.openxmlformats.org/presentationml/2006/main">
+  <p:cSld>
+    <p:spTree>
+      <p:nvGrpSpPr>
+        <p:cNvPr id="1" name=""/>
+        <p:cNvGrpSpPr/>
+        <p:nvPr/>
+      </p:nvGrpSpPr>
+      <p:grpSpPr>
+        <a:xfrm>
+          <a:off x="0" y="0"/>
+          <a:ext cx="0" cy="0"/>
+          <a:chOff x="0" y="0"/>
+          <a:chExt cx="0" cy="0"/>
+        </a:xfrm>
+      </p:grpSpPr>
+      <p:sp>
+        <p:nvSpPr>
+          <p:cNvPr id="2" name="Título 1">
+            <a:extLst>
+              <a:ext uri="{FF2B5EF4-FFF2-40B4-BE49-F238E27FC236}">
+                <a16:creationId xmlns:a16="http://schemas.microsoft.com/office/drawing/2014/main" id="{5A169926-66C9-E8D9-E88F-DF83CCC3046F}"/>
+              </a:ext>
+            </a:extLst>
+          </p:cNvPr>
+          <p:cNvSpPr>
+            <a:spLocks noGrp="1"/>
+          </p:cNvSpPr>
+          <p:nvPr>
+            <p:ph type="title"/>
+          </p:nvPr>
+        </p:nvSpPr>
+        <p:spPr/>
+        <p:txBody>
+          <a:bodyPr/>
+          <a:lstStyle/>
+          <a:p>
+            <a:r>
+              <a:rPr lang="pt-BR" dirty="0"/>
+              <a:t>DELETE → 204 No </a:t>
+            </a:r>
+            <a:r>
+              <a:rPr lang="pt-BR" dirty="0" err="1"/>
+              <a:t>Content</a:t>
+            </a:r>
+            <a:endParaRPr lang="pt-BR" dirty="0"/>
+          </a:p>
+        </p:txBody>
+      </p:sp>
+      <p:sp>
+        <p:nvSpPr>
+          <p:cNvPr id="4" name="Espaço Reservado para Conteúdo 5">
+            <a:extLst>
+              <a:ext uri="{FF2B5EF4-FFF2-40B4-BE49-F238E27FC236}">
+                <a16:creationId xmlns:a16="http://schemas.microsoft.com/office/drawing/2014/main" id="{B985A1DE-1C57-DBCF-90DE-766022BEF0FB}"/>
+              </a:ext>
+            </a:extLst>
+          </p:cNvPr>
+          <p:cNvSpPr txBox="1">
+            <a:spLocks/>
+          </p:cNvSpPr>
+          <p:nvPr/>
+        </p:nvSpPr>
+        <p:spPr>
+          <a:xfrm>
+            <a:off x="592347" y="1844675"/>
+            <a:ext cx="3854962" cy="934299"/>
+          </a:xfrm>
+          <a:prstGeom prst="rect">
+            <a:avLst/>
+          </a:prstGeom>
+        </p:spPr>
+        <p:txBody>
+          <a:bodyPr/>
+          <a:lstStyle>
+            <a:lvl1pPr marL="0" indent="0" algn="just" defTabSz="914400" rtl="0" eaLnBrk="1" latinLnBrk="0" hangingPunct="1">
+              <a:lnSpc>
+                <a:spcPct val="150000"/>
+              </a:lnSpc>
+              <a:spcBef>
+                <a:spcPts val="0"/>
+              </a:spcBef>
+              <a:buFont typeface="Arial" panose="020B0604020202020204" pitchFamily="34" charset="0"/>
+              <a:buNone/>
+              <a:defRPr sz="2000" kern="1200">
+                <a:solidFill>
+                  <a:schemeClr val="tx1"/>
+                </a:solidFill>
+                <a:latin typeface="Times New Roman" panose="02020603050405020304" pitchFamily="18" charset="0"/>
+                <a:ea typeface="+mn-ea"/>
+                <a:cs typeface="Times New Roman" panose="02020603050405020304" pitchFamily="18" charset="0"/>
+              </a:defRPr>
+            </a:lvl1pPr>
+            <a:lvl2pPr marL="457200" indent="0" algn="just" defTabSz="914400" rtl="0" eaLnBrk="1" latinLnBrk="0" hangingPunct="1">
+              <a:lnSpc>
+                <a:spcPct val="150000"/>
+              </a:lnSpc>
+              <a:spcBef>
+                <a:spcPts val="0"/>
+              </a:spcBef>
+              <a:buFont typeface="Arial" panose="020B0604020202020204" pitchFamily="34" charset="0"/>
+              <a:buNone/>
+              <a:defRPr sz="1600" kern="1200">
+                <a:solidFill>
+                  <a:schemeClr val="tx1"/>
+                </a:solidFill>
+                <a:latin typeface="Times New Roman" panose="02020603050405020304" pitchFamily="18" charset="0"/>
+                <a:ea typeface="+mn-ea"/>
+                <a:cs typeface="Times New Roman" panose="02020603050405020304" pitchFamily="18" charset="0"/>
+              </a:defRPr>
+            </a:lvl2pPr>
+            <a:lvl3pPr marL="914400" indent="0" algn="just" defTabSz="914400" rtl="0" eaLnBrk="1" latinLnBrk="0" hangingPunct="1">
+              <a:lnSpc>
+                <a:spcPct val="150000"/>
+              </a:lnSpc>
+              <a:spcBef>
+                <a:spcPts val="0"/>
+              </a:spcBef>
+              <a:buFont typeface="Arial" panose="020B0604020202020204" pitchFamily="34" charset="0"/>
+              <a:buNone/>
+              <a:defRPr sz="1400" kern="1200">
+                <a:solidFill>
+                  <a:schemeClr val="tx1"/>
+                </a:solidFill>
+                <a:latin typeface="Times New Roman" panose="02020603050405020304" pitchFamily="18" charset="0"/>
+                <a:ea typeface="+mn-ea"/>
+                <a:cs typeface="Times New Roman" panose="02020603050405020304" pitchFamily="18" charset="0"/>
+              </a:defRPr>
+            </a:lvl3pPr>
+            <a:lvl4pPr marL="1371600" indent="0" algn="just" defTabSz="914400" rtl="0" eaLnBrk="1" latinLnBrk="0" hangingPunct="1">
+              <a:lnSpc>
+                <a:spcPct val="150000"/>
+              </a:lnSpc>
+              <a:spcBef>
+                <a:spcPts val="0"/>
+              </a:spcBef>
+              <a:buFont typeface="Arial" panose="020B0604020202020204" pitchFamily="34" charset="0"/>
+              <a:buNone/>
+              <a:defRPr sz="1200" kern="1200">
+                <a:solidFill>
+                  <a:schemeClr val="tx1"/>
+                </a:solidFill>
+                <a:latin typeface="Times New Roman" panose="02020603050405020304" pitchFamily="18" charset="0"/>
+                <a:ea typeface="+mn-ea"/>
+                <a:cs typeface="Times New Roman" panose="02020603050405020304" pitchFamily="18" charset="0"/>
+              </a:defRPr>
+            </a:lvl4pPr>
+            <a:lvl5pPr marL="1828800" indent="0" algn="just" defTabSz="914400" rtl="0" eaLnBrk="1" latinLnBrk="0" hangingPunct="1">
+              <a:lnSpc>
+                <a:spcPct val="150000"/>
+              </a:lnSpc>
+              <a:spcBef>
+                <a:spcPts val="0"/>
+              </a:spcBef>
+              <a:buFont typeface="Arial" panose="020B0604020202020204" pitchFamily="34" charset="0"/>
+              <a:buNone/>
+              <a:defRPr sz="1000" kern="1200">
+                <a:solidFill>
+                  <a:schemeClr val="tx1"/>
+                </a:solidFill>
+                <a:latin typeface="Times New Roman" panose="02020603050405020304" pitchFamily="18" charset="0"/>
+                <a:ea typeface="+mn-ea"/>
+                <a:cs typeface="Times New Roman" panose="02020603050405020304" pitchFamily="18" charset="0"/>
+              </a:defRPr>
+            </a:lvl5pPr>
+            <a:lvl6pPr marL="2514600" indent="-228600" algn="l" defTabSz="914400" rtl="0" eaLnBrk="1" latinLnBrk="0" hangingPunct="1">
+              <a:lnSpc>
+                <a:spcPct val="90000"/>
+              </a:lnSpc>
+              <a:spcBef>
+                <a:spcPts val="500"/>
+              </a:spcBef>
+              <a:buFont typeface="Arial" panose="020B0604020202020204" pitchFamily="34" charset="0"/>
+              <a:buChar char="•"/>
+              <a:defRPr sz="1800" kern="1200">
+                <a:solidFill>
+                  <a:schemeClr val="tx1"/>
+                </a:solidFill>
+                <a:latin typeface="+mn-lt"/>
+                <a:ea typeface="+mn-ea"/>
+                <a:cs typeface="+mn-cs"/>
+              </a:defRPr>
+            </a:lvl6pPr>
+            <a:lvl7pPr marL="2971800" indent="-228600" algn="l" defTabSz="914400" rtl="0" eaLnBrk="1" latinLnBrk="0" hangingPunct="1">
+              <a:lnSpc>
+                <a:spcPct val="90000"/>
+              </a:lnSpc>
+              <a:spcBef>
+                <a:spcPts val="500"/>
+              </a:spcBef>
+              <a:buFont typeface="Arial" panose="020B0604020202020204" pitchFamily="34" charset="0"/>
+              <a:buChar char="•"/>
+              <a:defRPr sz="1800" kern="1200">
+                <a:solidFill>
+                  <a:schemeClr val="tx1"/>
+                </a:solidFill>
+                <a:latin typeface="+mn-lt"/>
+                <a:ea typeface="+mn-ea"/>
+                <a:cs typeface="+mn-cs"/>
+              </a:defRPr>
+            </a:lvl7pPr>
+            <a:lvl8pPr marL="3429000" indent="-228600" algn="l" defTabSz="914400" rtl="0" eaLnBrk="1" latinLnBrk="0" hangingPunct="1">
+              <a:lnSpc>
+                <a:spcPct val="90000"/>
+              </a:lnSpc>
+              <a:spcBef>
+                <a:spcPts val="500"/>
+              </a:spcBef>
+              <a:buFont typeface="Arial" panose="020B0604020202020204" pitchFamily="34" charset="0"/>
+              <a:buChar char="•"/>
+              <a:defRPr sz="1800" kern="1200">
+                <a:solidFill>
+                  <a:schemeClr val="tx1"/>
+                </a:solidFill>
+                <a:latin typeface="+mn-lt"/>
+                <a:ea typeface="+mn-ea"/>
+                <a:cs typeface="+mn-cs"/>
+              </a:defRPr>
+            </a:lvl8pPr>
+            <a:lvl9pPr marL="3886200" indent="-228600" algn="l" defTabSz="914400" rtl="0" eaLnBrk="1" latinLnBrk="0" hangingPunct="1">
+              <a:lnSpc>
+                <a:spcPct val="90000"/>
+              </a:lnSpc>
+              <a:spcBef>
+                <a:spcPts val="500"/>
+              </a:spcBef>
+              <a:buFont typeface="Arial" panose="020B0604020202020204" pitchFamily="34" charset="0"/>
+              <a:buChar char="•"/>
+              <a:defRPr sz="1800" kern="1200">
+                <a:solidFill>
+                  <a:schemeClr val="tx1"/>
+                </a:solidFill>
+                <a:latin typeface="+mn-lt"/>
+                <a:ea typeface="+mn-ea"/>
+                <a:cs typeface="+mn-cs"/>
+              </a:defRPr>
+            </a:lvl9pPr>
+          </a:lstStyle>
+          <a:p>
+            <a:r>
+              <a:rPr lang="pt-BR" dirty="0"/>
+              <a:t>Excluindo um recurso</a:t>
+            </a:r>
+          </a:p>
+          <a:p>
+            <a:r>
+              <a:rPr lang="pt-BR" dirty="0"/>
+              <a:t>O DELETE remove um recurso:</a:t>
+            </a:r>
+          </a:p>
+        </p:txBody>
+      </p:sp>
+      <p:grpSp>
+        <p:nvGrpSpPr>
+          <p:cNvPr id="5" name="Agrupar 4">
+            <a:extLst>
+              <a:ext uri="{FF2B5EF4-FFF2-40B4-BE49-F238E27FC236}">
+                <a16:creationId xmlns:a16="http://schemas.microsoft.com/office/drawing/2014/main" id="{CFE8BC8B-B77C-EA18-385E-A8ADEC830A8A}"/>
+              </a:ext>
+            </a:extLst>
+          </p:cNvPr>
+          <p:cNvGrpSpPr/>
+          <p:nvPr/>
+        </p:nvGrpSpPr>
+        <p:grpSpPr>
+          <a:xfrm>
+            <a:off x="749184" y="3094765"/>
+            <a:ext cx="8907433" cy="638572"/>
+            <a:chOff x="749185" y="2527734"/>
+            <a:chExt cx="5284556" cy="638572"/>
+          </a:xfrm>
+        </p:grpSpPr>
+        <p:sp>
+          <p:nvSpPr>
+            <p:cNvPr id="6" name="Shape 20">
+              <a:extLst>
+                <a:ext uri="{FF2B5EF4-FFF2-40B4-BE49-F238E27FC236}">
+                  <a16:creationId xmlns:a16="http://schemas.microsoft.com/office/drawing/2014/main" id="{0792856E-ADEE-0B2B-C0D2-088D46F750EF}"/>
+                </a:ext>
+              </a:extLst>
+            </p:cNvPr>
+            <p:cNvSpPr/>
+            <p:nvPr/>
+          </p:nvSpPr>
+          <p:spPr>
+            <a:xfrm>
+              <a:off x="749185" y="2527734"/>
+              <a:ext cx="5284556" cy="638572"/>
+            </a:xfrm>
+            <a:prstGeom prst="roundRect">
+              <a:avLst>
+                <a:gd name="adj" fmla="val 8081"/>
+              </a:avLst>
+            </a:prstGeom>
+            <a:solidFill>
+              <a:srgbClr val="F2F2F2"/>
+            </a:solidFill>
+            <a:ln/>
+          </p:spPr>
+          <p:txBody>
+            <a:bodyPr/>
+            <a:lstStyle/>
+            <a:p>
+              <a:endParaRPr lang="pt-BR"/>
+            </a:p>
+          </p:txBody>
+        </p:sp>
+        <p:sp>
+          <p:nvSpPr>
+            <p:cNvPr id="7" name="Text 21">
+              <a:extLst>
+                <a:ext uri="{FF2B5EF4-FFF2-40B4-BE49-F238E27FC236}">
+                  <a16:creationId xmlns:a16="http://schemas.microsoft.com/office/drawing/2014/main" id="{34FCB611-6168-027F-8F72-D032DAAE9404}"/>
+                </a:ext>
+              </a:extLst>
+            </p:cNvPr>
+            <p:cNvSpPr/>
+            <p:nvPr/>
+          </p:nvSpPr>
+          <p:spPr>
+            <a:xfrm>
+              <a:off x="896521" y="2712610"/>
+              <a:ext cx="4989884" cy="268820"/>
+            </a:xfrm>
+            <a:prstGeom prst="rect">
+              <a:avLst/>
+            </a:prstGeom>
+            <a:noFill/>
+            <a:ln/>
+          </p:spPr>
+          <p:txBody>
+            <a:bodyPr wrap="square" lIns="0" tIns="0" rIns="0" bIns="0" rtlCol="0" anchor="t">
+              <a:noAutofit/>
+            </a:bodyPr>
+            <a:lstStyle/>
+            <a:p>
+              <a:pPr marL="0" indent="0" algn="l">
+                <a:buNone/>
+              </a:pPr>
+              <a:r>
+                <a:rPr lang="en-US" kern="0" spc="-19" dirty="0">
+                  <a:solidFill>
+                    <a:srgbClr val="D73A49"/>
+                  </a:solidFill>
+                  <a:latin typeface="Consolas" pitchFamily="34" charset="0"/>
+                  <a:ea typeface="Consolas" pitchFamily="34" charset="-122"/>
+                  <a:cs typeface="Consolas" pitchFamily="34" charset="-120"/>
+                </a:rPr>
+                <a:t>DELETE /</a:t>
+              </a:r>
+              <a:r>
+                <a:rPr lang="en-US" kern="0" spc="-19" dirty="0" err="1">
+                  <a:solidFill>
+                    <a:srgbClr val="D73A49"/>
+                  </a:solidFill>
+                  <a:latin typeface="Consolas" pitchFamily="34" charset="0"/>
+                  <a:ea typeface="Consolas" pitchFamily="34" charset="-122"/>
+                  <a:cs typeface="Consolas" pitchFamily="34" charset="-120"/>
+                </a:rPr>
+                <a:t>dentistas</a:t>
+              </a:r>
+              <a:r>
+                <a:rPr lang="en-US" kern="0" spc="-19" dirty="0">
+                  <a:solidFill>
+                    <a:srgbClr val="D73A49"/>
+                  </a:solidFill>
+                  <a:latin typeface="Consolas" pitchFamily="34" charset="0"/>
+                  <a:ea typeface="Consolas" pitchFamily="34" charset="-122"/>
+                  <a:cs typeface="Consolas" pitchFamily="34" charset="-120"/>
+                </a:rPr>
+                <a:t>/10</a:t>
+              </a:r>
+              <a:endParaRPr lang="en-US" dirty="0"/>
+            </a:p>
+          </p:txBody>
+        </p:sp>
+      </p:grpSp>
+      <p:sp>
+        <p:nvSpPr>
+          <p:cNvPr id="8" name="CaixaDeTexto 7">
+            <a:extLst>
+              <a:ext uri="{FF2B5EF4-FFF2-40B4-BE49-F238E27FC236}">
+                <a16:creationId xmlns:a16="http://schemas.microsoft.com/office/drawing/2014/main" id="{E228A5B1-C484-25ED-07D5-96C8C9E0663A}"/>
+              </a:ext>
+            </a:extLst>
+          </p:cNvPr>
+          <p:cNvSpPr txBox="1"/>
+          <p:nvPr/>
+        </p:nvSpPr>
+        <p:spPr>
+          <a:xfrm>
+            <a:off x="592347" y="4049128"/>
+            <a:ext cx="3900963" cy="400110"/>
+          </a:xfrm>
+          <a:prstGeom prst="rect">
+            <a:avLst/>
+          </a:prstGeom>
+          <a:noFill/>
+        </p:spPr>
+        <p:txBody>
+          <a:bodyPr wrap="square">
+            <a:spAutoFit/>
+          </a:bodyPr>
+          <a:lstStyle/>
+          <a:p>
+            <a:r>
+              <a:rPr lang="pt-BR" sz="2000" dirty="0">
+                <a:latin typeface="Times New Roman" panose="02020603050405020304" pitchFamily="18" charset="0"/>
+                <a:cs typeface="Times New Roman" panose="02020603050405020304" pitchFamily="18" charset="0"/>
+              </a:rPr>
+              <a:t>Se a exclusão ocorrer com sucesso:</a:t>
+            </a:r>
+          </a:p>
+        </p:txBody>
+      </p:sp>
+      <p:grpSp>
+        <p:nvGrpSpPr>
+          <p:cNvPr id="9" name="Agrupar 8">
+            <a:extLst>
+              <a:ext uri="{FF2B5EF4-FFF2-40B4-BE49-F238E27FC236}">
+                <a16:creationId xmlns:a16="http://schemas.microsoft.com/office/drawing/2014/main" id="{BC709487-7ECE-3733-C273-F44D2FF513FA}"/>
+              </a:ext>
+            </a:extLst>
+          </p:cNvPr>
+          <p:cNvGrpSpPr/>
+          <p:nvPr/>
+        </p:nvGrpSpPr>
+        <p:grpSpPr>
+          <a:xfrm>
+            <a:off x="749185" y="4765029"/>
+            <a:ext cx="8907432" cy="522650"/>
+            <a:chOff x="749185" y="2527734"/>
+            <a:chExt cx="4477939" cy="638572"/>
+          </a:xfrm>
+        </p:grpSpPr>
+        <p:sp>
+          <p:nvSpPr>
+            <p:cNvPr id="10" name="Shape 20">
+              <a:extLst>
+                <a:ext uri="{FF2B5EF4-FFF2-40B4-BE49-F238E27FC236}">
+                  <a16:creationId xmlns:a16="http://schemas.microsoft.com/office/drawing/2014/main" id="{AFB8129F-1E14-8F35-7574-175C494FB5A4}"/>
+                </a:ext>
+              </a:extLst>
+            </p:cNvPr>
+            <p:cNvSpPr/>
+            <p:nvPr/>
+          </p:nvSpPr>
+          <p:spPr>
+            <a:xfrm>
+              <a:off x="749185" y="2527734"/>
+              <a:ext cx="4477939" cy="638572"/>
+            </a:xfrm>
+            <a:prstGeom prst="roundRect">
+              <a:avLst>
+                <a:gd name="adj" fmla="val 8081"/>
+              </a:avLst>
+            </a:prstGeom>
+            <a:solidFill>
+              <a:srgbClr val="F2F2F2"/>
+            </a:solidFill>
+            <a:ln/>
+          </p:spPr>
+          <p:txBody>
+            <a:bodyPr/>
+            <a:lstStyle/>
+            <a:p>
+              <a:endParaRPr lang="pt-BR"/>
+            </a:p>
+          </p:txBody>
+        </p:sp>
+        <p:sp>
+          <p:nvSpPr>
+            <p:cNvPr id="11" name="Text 21">
+              <a:extLst>
+                <a:ext uri="{FF2B5EF4-FFF2-40B4-BE49-F238E27FC236}">
+                  <a16:creationId xmlns:a16="http://schemas.microsoft.com/office/drawing/2014/main" id="{54A36054-122B-868F-925A-DD6F2AF26F47}"/>
+                </a:ext>
+              </a:extLst>
+            </p:cNvPr>
+            <p:cNvSpPr/>
+            <p:nvPr/>
+          </p:nvSpPr>
+          <p:spPr>
+            <a:xfrm>
+              <a:off x="896523" y="2670506"/>
+              <a:ext cx="4228246" cy="353028"/>
+            </a:xfrm>
+            <a:prstGeom prst="rect">
+              <a:avLst/>
+            </a:prstGeom>
+            <a:noFill/>
+            <a:ln/>
+          </p:spPr>
+          <p:txBody>
+            <a:bodyPr wrap="square" lIns="0" tIns="0" rIns="0" bIns="0" rtlCol="0" anchor="t">
+              <a:noAutofit/>
+            </a:bodyPr>
+            <a:lstStyle/>
+            <a:p>
+              <a:r>
+                <a:rPr lang="pt-BR" kern="0" spc="-19" dirty="0">
+                  <a:solidFill>
+                    <a:srgbClr val="D73A49"/>
+                  </a:solidFill>
+                  <a:latin typeface="Consolas" pitchFamily="34" charset="0"/>
+                </a:rPr>
+                <a:t>204 No </a:t>
+              </a:r>
+              <a:r>
+                <a:rPr lang="pt-BR" kern="0" spc="-19" dirty="0" err="1">
+                  <a:solidFill>
+                    <a:srgbClr val="D73A49"/>
+                  </a:solidFill>
+                  <a:latin typeface="Consolas" pitchFamily="34" charset="0"/>
+                </a:rPr>
+                <a:t>Content</a:t>
+              </a:r>
+              <a:endParaRPr lang="pt-BR" kern="0" spc="-19" dirty="0">
+                <a:solidFill>
+                  <a:srgbClr val="D73A49"/>
+                </a:solidFill>
+                <a:latin typeface="Consolas" pitchFamily="34" charset="0"/>
+              </a:endParaRPr>
+            </a:p>
+          </p:txBody>
+        </p:sp>
+      </p:grpSp>
+      <p:sp>
+        <p:nvSpPr>
+          <p:cNvPr id="17" name="CaixaDeTexto 16">
+            <a:extLst>
+              <a:ext uri="{FF2B5EF4-FFF2-40B4-BE49-F238E27FC236}">
+                <a16:creationId xmlns:a16="http://schemas.microsoft.com/office/drawing/2014/main" id="{5276BF1F-FE60-7935-32B4-0812C890ED2B}"/>
+              </a:ext>
+            </a:extLst>
+          </p:cNvPr>
+          <p:cNvSpPr txBox="1"/>
+          <p:nvPr/>
+        </p:nvSpPr>
+        <p:spPr>
+          <a:xfrm>
+            <a:off x="592347" y="5603470"/>
+            <a:ext cx="10837653" cy="400110"/>
+          </a:xfrm>
+          <a:prstGeom prst="rect">
+            <a:avLst/>
+          </a:prstGeom>
+          <a:noFill/>
+        </p:spPr>
+        <p:txBody>
+          <a:bodyPr wrap="square">
+            <a:spAutoFit/>
+          </a:bodyPr>
+          <a:lstStyle/>
+          <a:p>
+            <a:r>
+              <a:rPr lang="pt-BR" sz="2000" dirty="0">
+                <a:latin typeface="Times New Roman" panose="02020603050405020304" pitchFamily="18" charset="0"/>
+                <a:cs typeface="Times New Roman" panose="02020603050405020304" pitchFamily="18" charset="0"/>
+              </a:rPr>
+              <a:t>Como não existe necessariamente informação para devolver, o corpo da resposta pode ficar vazio.</a:t>
+            </a:r>
+          </a:p>
+        </p:txBody>
+      </p:sp>
+    </p:spTree>
+    <p:extLst>
+      <p:ext uri="{BB962C8B-B14F-4D97-AF65-F5344CB8AC3E}">
+        <p14:creationId xmlns:p14="http://schemas.microsoft.com/office/powerpoint/2010/main" val="1843293768"/>
+      </p:ext>
+    </p:extLst>
+  </p:cSld>
+  <p:clrMapOvr>
+    <a:masterClrMapping/>
+  </p:clrMapOvr>
+</p:sld>
+</file>
+
+<file path=ppt/slides/slide6.xml><?xml version="1.0" encoding="utf-8"?>
+<p:sld xmlns:a="http://schemas.openxmlformats.org/drawingml/2006/main" xmlns:r="http://schemas.openxmlformats.org/officeDocument/2006/relationships" xmlns:p="http://schemas.openxmlformats.org/presentationml/2006/main">
+  <p:cSld>
+    <p:spTree>
+      <p:nvGrpSpPr>
+        <p:cNvPr id="1" name=""/>
+        <p:cNvGrpSpPr/>
+        <p:nvPr/>
+      </p:nvGrpSpPr>
+      <p:grpSpPr>
+        <a:xfrm>
+          <a:off x="0" y="0"/>
+          <a:ext cx="0" cy="0"/>
+          <a:chOff x="0" y="0"/>
+          <a:chExt cx="0" cy="0"/>
+        </a:xfrm>
+      </p:grpSpPr>
+      <p:sp>
+        <p:nvSpPr>
+          <p:cNvPr id="2" name="Título 1">
+            <a:extLst>
+              <a:ext uri="{FF2B5EF4-FFF2-40B4-BE49-F238E27FC236}">
+                <a16:creationId xmlns:a16="http://schemas.microsoft.com/office/drawing/2014/main" id="{C3DA52F6-A789-393D-0223-A390957C841A}"/>
+              </a:ext>
+            </a:extLst>
+          </p:cNvPr>
+          <p:cNvSpPr>
+            <a:spLocks noGrp="1"/>
+          </p:cNvSpPr>
+          <p:nvPr>
+            <p:ph type="title"/>
+          </p:nvPr>
+        </p:nvSpPr>
+        <p:spPr/>
+        <p:txBody>
+          <a:bodyPr/>
+          <a:lstStyle/>
+          <a:p>
+            <a:r>
+              <a:rPr lang="pt-BR" dirty="0"/>
+              <a:t>Colocando </a:t>
+            </a:r>
+            <a:r>
+              <a:rPr lang="pt-BR"/>
+              <a:t>em prática</a:t>
+            </a:r>
+          </a:p>
+        </p:txBody>
+      </p:sp>
+      <p:sp>
+        <p:nvSpPr>
+          <p:cNvPr id="3" name="Espaço Reservado para Conteúdo 2">
+            <a:extLst>
+              <a:ext uri="{FF2B5EF4-FFF2-40B4-BE49-F238E27FC236}">
+                <a16:creationId xmlns:a16="http://schemas.microsoft.com/office/drawing/2014/main" id="{5D5AEEF6-6526-B691-C20D-CD6DE1149685}"/>
+              </a:ext>
+            </a:extLst>
+          </p:cNvPr>
+          <p:cNvSpPr>
+            <a:spLocks noGrp="1"/>
+          </p:cNvSpPr>
+          <p:nvPr>
+            <p:ph idx="1"/>
+          </p:nvPr>
+        </p:nvSpPr>
+        <p:spPr/>
+        <p:txBody>
+          <a:bodyPr/>
+          <a:lstStyle/>
+          <a:p>
+            <a:endParaRPr lang="pt-BR"/>
+          </a:p>
+        </p:txBody>
+      </p:sp>
+    </p:spTree>
+    <p:extLst>
+      <p:ext uri="{BB962C8B-B14F-4D97-AF65-F5344CB8AC3E}">
+        <p14:creationId xmlns:p14="http://schemas.microsoft.com/office/powerpoint/2010/main" val="1400886347"/>
+      </p:ext>
+    </p:extLst>
+  </p:cSld>
+  <p:clrMapOvr>
+    <a:masterClrMapping/>
+  </p:clrMapOvr>
+</p:sld>
+</file>
+
 <file path=ppt/theme/theme1.xml><?xml version="1.0" encoding="utf-8"?>
 <a:theme xmlns:a="http://schemas.openxmlformats.org/drawingml/2006/main" name="Tema do Office">
   <a:themeElements>

--- a/Desenvolvimento de Software Corporativo/Boa Praticas/Aula04-BoasPraticas/Modelo de Apresentação.pptx
+++ b/Desenvolvimento de Software Corporativo/Boa Praticas/Aula04-BoasPraticas/Modelo de Apresentação.pptx
@@ -11,6 +11,8 @@
     <p:sldId id="263" r:id="rId5"/>
     <p:sldId id="264" r:id="rId6"/>
     <p:sldId id="265" r:id="rId7"/>
+    <p:sldId id="267" r:id="rId8"/>
+    <p:sldId id="266" r:id="rId9"/>
   </p:sldIdLst>
   <p:sldSz cx="12192000" cy="6858000"/>
   <p:notesSz cx="6858000" cy="9144000"/>
@@ -6060,12 +6062,255 @@
           </a:p>
         </p:txBody>
       </p:sp>
+      <p:pic>
+        <p:nvPicPr>
+          <p:cNvPr id="5" name="Imagem 4" descr="Tela de celular&#10;&#10;O conteúdo gerado por IA pode estar incorreto.">
+            <a:extLst>
+              <a:ext uri="{FF2B5EF4-FFF2-40B4-BE49-F238E27FC236}">
+                <a16:creationId xmlns:a16="http://schemas.microsoft.com/office/drawing/2014/main" id="{F5DDB60E-DFAD-AB23-8357-1FFC1BD44B15}"/>
+              </a:ext>
+            </a:extLst>
+          </p:cNvPr>
+          <p:cNvPicPr>
+            <a:picLocks noChangeAspect="1"/>
+          </p:cNvPicPr>
+          <p:nvPr/>
+        </p:nvPicPr>
+        <p:blipFill>
+          <a:blip r:embed="rId2"/>
+          <a:stretch>
+            <a:fillRect/>
+          </a:stretch>
+        </p:blipFill>
+        <p:spPr>
+          <a:xfrm>
+            <a:off x="2423600" y="2207910"/>
+            <a:ext cx="7344800" cy="1638529"/>
+          </a:xfrm>
+          <a:prstGeom prst="rect">
+            <a:avLst/>
+          </a:prstGeom>
+        </p:spPr>
+      </p:pic>
+      <p:pic>
+        <p:nvPicPr>
+          <p:cNvPr id="7" name="Imagem 6" descr="Texto&#10;&#10;O conteúdo gerado por IA pode estar incorreto.">
+            <a:extLst>
+              <a:ext uri="{FF2B5EF4-FFF2-40B4-BE49-F238E27FC236}">
+                <a16:creationId xmlns:a16="http://schemas.microsoft.com/office/drawing/2014/main" id="{73591627-856C-55F0-D6AE-196821AA1D63}"/>
+              </a:ext>
+            </a:extLst>
+          </p:cNvPr>
+          <p:cNvPicPr>
+            <a:picLocks noChangeAspect="1"/>
+          </p:cNvPicPr>
+          <p:nvPr/>
+        </p:nvPicPr>
+        <p:blipFill>
+          <a:blip r:embed="rId3"/>
+          <a:stretch>
+            <a:fillRect/>
+          </a:stretch>
+        </p:blipFill>
+        <p:spPr>
+          <a:xfrm>
+            <a:off x="3409448" y="4751356"/>
+            <a:ext cx="5373105" cy="1538607"/>
+          </a:xfrm>
+          <a:prstGeom prst="rect">
+            <a:avLst/>
+          </a:prstGeom>
+        </p:spPr>
+      </p:pic>
+    </p:spTree>
+    <p:extLst>
+      <p:ext uri="{BB962C8B-B14F-4D97-AF65-F5344CB8AC3E}">
+        <p14:creationId xmlns:p14="http://schemas.microsoft.com/office/powerpoint/2010/main" val="1400886347"/>
+      </p:ext>
+    </p:extLst>
+  </p:cSld>
+  <p:clrMapOvr>
+    <a:masterClrMapping/>
+  </p:clrMapOvr>
+</p:sld>
+</file>
+
+<file path=ppt/slides/slide7.xml><?xml version="1.0" encoding="utf-8"?>
+<p:sld xmlns:a="http://schemas.openxmlformats.org/drawingml/2006/main" xmlns:r="http://schemas.openxmlformats.org/officeDocument/2006/relationships" xmlns:p="http://schemas.openxmlformats.org/presentationml/2006/main">
+  <p:cSld>
+    <p:spTree>
+      <p:nvGrpSpPr>
+        <p:cNvPr id="1" name="">
+          <a:extLst>
+            <a:ext uri="{FF2B5EF4-FFF2-40B4-BE49-F238E27FC236}">
+              <a16:creationId xmlns:a16="http://schemas.microsoft.com/office/drawing/2014/main" id="{59993DCA-E4E4-845E-D23E-82890D1A472E}"/>
+            </a:ext>
+          </a:extLst>
+        </p:cNvPr>
+        <p:cNvGrpSpPr/>
+        <p:nvPr/>
+      </p:nvGrpSpPr>
+      <p:grpSpPr>
+        <a:xfrm>
+          <a:off x="0" y="0"/>
+          <a:ext cx="0" cy="0"/>
+          <a:chOff x="0" y="0"/>
+          <a:chExt cx="0" cy="0"/>
+        </a:xfrm>
+      </p:grpSpPr>
+      <p:sp>
+        <p:nvSpPr>
+          <p:cNvPr id="2" name="Título 1">
+            <a:extLst>
+              <a:ext uri="{FF2B5EF4-FFF2-40B4-BE49-F238E27FC236}">
+                <a16:creationId xmlns:a16="http://schemas.microsoft.com/office/drawing/2014/main" id="{81EE5BB9-3715-B5EC-AC01-0CA2A2F577B4}"/>
+              </a:ext>
+            </a:extLst>
+          </p:cNvPr>
+          <p:cNvSpPr>
+            <a:spLocks noGrp="1"/>
+          </p:cNvSpPr>
+          <p:nvPr>
+            <p:ph type="title"/>
+          </p:nvPr>
+        </p:nvSpPr>
+        <p:spPr/>
+        <p:txBody>
+          <a:bodyPr/>
+          <a:lstStyle/>
+          <a:p>
+            <a:r>
+              <a:rPr lang="pt-BR" dirty="0"/>
+              <a:t>Colocando </a:t>
+            </a:r>
+            <a:r>
+              <a:rPr lang="pt-BR"/>
+              <a:t>em prática</a:t>
+            </a:r>
+          </a:p>
+        </p:txBody>
+      </p:sp>
+      <p:pic>
+        <p:nvPicPr>
+          <p:cNvPr id="4" name="Imagem 3" descr="Tela de celular&#10;&#10;O conteúdo gerado por IA pode estar incorreto.">
+            <a:extLst>
+              <a:ext uri="{FF2B5EF4-FFF2-40B4-BE49-F238E27FC236}">
+                <a16:creationId xmlns:a16="http://schemas.microsoft.com/office/drawing/2014/main" id="{5866078B-6D83-5864-0345-F6E1F5BBE7D0}"/>
+              </a:ext>
+            </a:extLst>
+          </p:cNvPr>
+          <p:cNvPicPr>
+            <a:picLocks noChangeAspect="1"/>
+          </p:cNvPicPr>
+          <p:nvPr/>
+        </p:nvPicPr>
+        <p:blipFill>
+          <a:blip r:embed="rId2"/>
+          <a:stretch>
+            <a:fillRect/>
+          </a:stretch>
+        </p:blipFill>
+        <p:spPr>
+          <a:xfrm>
+            <a:off x="2256889" y="1849700"/>
+            <a:ext cx="7678222" cy="1676634"/>
+          </a:xfrm>
+          <a:prstGeom prst="rect">
+            <a:avLst/>
+          </a:prstGeom>
+        </p:spPr>
+      </p:pic>
+      <p:pic>
+        <p:nvPicPr>
+          <p:cNvPr id="8" name="Imagem 7" descr="Texto&#10;&#10;O conteúdo gerado por IA pode estar incorreto.">
+            <a:extLst>
+              <a:ext uri="{FF2B5EF4-FFF2-40B4-BE49-F238E27FC236}">
+                <a16:creationId xmlns:a16="http://schemas.microsoft.com/office/drawing/2014/main" id="{6E381689-411A-EF00-0497-0440A52E8EEC}"/>
+              </a:ext>
+            </a:extLst>
+          </p:cNvPr>
+          <p:cNvPicPr>
+            <a:picLocks noChangeAspect="1"/>
+          </p:cNvPicPr>
+          <p:nvPr/>
+        </p:nvPicPr>
+        <p:blipFill>
+          <a:blip r:embed="rId3"/>
+          <a:stretch>
+            <a:fillRect/>
+          </a:stretch>
+        </p:blipFill>
+        <p:spPr>
+          <a:xfrm>
+            <a:off x="2584165" y="4169983"/>
+            <a:ext cx="7023670" cy="1968245"/>
+          </a:xfrm>
+          <a:prstGeom prst="rect">
+            <a:avLst/>
+          </a:prstGeom>
+        </p:spPr>
+      </p:pic>
+    </p:spTree>
+    <p:extLst>
+      <p:ext uri="{BB962C8B-B14F-4D97-AF65-F5344CB8AC3E}">
+        <p14:creationId xmlns:p14="http://schemas.microsoft.com/office/powerpoint/2010/main" val="4094522608"/>
+      </p:ext>
+    </p:extLst>
+  </p:cSld>
+  <p:clrMapOvr>
+    <a:masterClrMapping/>
+  </p:clrMapOvr>
+</p:sld>
+</file>
+
+<file path=ppt/slides/slide8.xml><?xml version="1.0" encoding="utf-8"?>
+<p:sld xmlns:a="http://schemas.openxmlformats.org/drawingml/2006/main" xmlns:r="http://schemas.openxmlformats.org/officeDocument/2006/relationships" xmlns:p="http://schemas.openxmlformats.org/presentationml/2006/main">
+  <p:cSld>
+    <p:spTree>
+      <p:nvGrpSpPr>
+        <p:cNvPr id="1" name=""/>
+        <p:cNvGrpSpPr/>
+        <p:nvPr/>
+      </p:nvGrpSpPr>
+      <p:grpSpPr>
+        <a:xfrm>
+          <a:off x="0" y="0"/>
+          <a:ext cx="0" cy="0"/>
+          <a:chOff x="0" y="0"/>
+          <a:chExt cx="0" cy="0"/>
+        </a:xfrm>
+      </p:grpSpPr>
+      <p:sp>
+        <p:nvSpPr>
+          <p:cNvPr id="2" name="Título 1">
+            <a:extLst>
+              <a:ext uri="{FF2B5EF4-FFF2-40B4-BE49-F238E27FC236}">
+                <a16:creationId xmlns:a16="http://schemas.microsoft.com/office/drawing/2014/main" id="{15A13988-3FAB-3D91-E08A-F445845AD8E5}"/>
+              </a:ext>
+            </a:extLst>
+          </p:cNvPr>
+          <p:cNvSpPr>
+            <a:spLocks noGrp="1"/>
+          </p:cNvSpPr>
+          <p:nvPr>
+            <p:ph type="title"/>
+          </p:nvPr>
+        </p:nvSpPr>
+        <p:spPr/>
+        <p:txBody>
+          <a:bodyPr/>
+          <a:lstStyle/>
+          <a:p>
+            <a:endParaRPr lang="pt-BR"/>
+          </a:p>
+        </p:txBody>
+      </p:sp>
       <p:sp>
         <p:nvSpPr>
           <p:cNvPr id="3" name="Espaço Reservado para Conteúdo 2">
             <a:extLst>
               <a:ext uri="{FF2B5EF4-FFF2-40B4-BE49-F238E27FC236}">
-                <a16:creationId xmlns:a16="http://schemas.microsoft.com/office/drawing/2014/main" id="{5D5AEEF6-6526-B691-C20D-CD6DE1149685}"/>
+                <a16:creationId xmlns:a16="http://schemas.microsoft.com/office/drawing/2014/main" id="{088F25C0-AA25-02FF-5D54-55E6DFA4A64C}"/>
               </a:ext>
             </a:extLst>
           </p:cNvPr>
@@ -6088,7 +6333,7 @@
     </p:spTree>
     <p:extLst>
       <p:ext uri="{BB962C8B-B14F-4D97-AF65-F5344CB8AC3E}">
-        <p14:creationId xmlns:p14="http://schemas.microsoft.com/office/powerpoint/2010/main" val="1400886347"/>
+        <p14:creationId xmlns:p14="http://schemas.microsoft.com/office/powerpoint/2010/main" val="1976832202"/>
       </p:ext>
     </p:extLst>
   </p:cSld>
